--- a/ietf126-draft-stone-spring-mpte-sr.pptx
+++ b/ietf126-draft-stone-spring-mpte-sr.pptx
@@ -124,7 +124,7 @@
 <file path=ppt/revisionInfo.xml><?xml version="1.0" encoding="utf-8"?>
 <p1510:revInfo xmlns:a="http://schemas.openxmlformats.org/drawingml/2006/main" xmlns:r="http://schemas.openxmlformats.org/officeDocument/2006/relationships" xmlns:p1510="http://schemas.microsoft.com/office/powerpoint/2015/10/main">
   <p1510:revLst>
-    <p1510:client id="{A9F8D530-B743-6B49-863D-0F227FED971A}" v="26" dt="2026-06-29T19:09:44.948"/>
+    <p1510:client id="{A9F8D530-B743-6B49-863D-0F227FED971A}" v="39" dt="2026-07-20T12:41:00.249"/>
   </p1510:revLst>
 </p1510:revInfo>
 </file>
@@ -134,688 +134,41 @@
   <pc:docChgLst>
     <pc:chgData name="Andrew Stone (Nokia)" userId="5e693d72-0831-418e-b3bc-937f682be9d6" providerId="ADAL" clId="{23AA7552-9185-5EEB-9431-C2796A246E54}"/>
     <pc:docChg chg="undo redo custSel addSld delSld modSld sldOrd">
-      <pc:chgData name="Andrew Stone (Nokia)" userId="5e693d72-0831-418e-b3bc-937f682be9d6" providerId="ADAL" clId="{23AA7552-9185-5EEB-9431-C2796A246E54}" dt="2026-06-29T19:22:14.079" v="5872" actId="20577"/>
+      <pc:chgData name="Andrew Stone (Nokia)" userId="5e693d72-0831-418e-b3bc-937f682be9d6" providerId="ADAL" clId="{23AA7552-9185-5EEB-9431-C2796A246E54}" dt="2026-08-07T15:16:54.635" v="6261" actId="1076"/>
       <pc:docMkLst>
         <pc:docMk/>
       </pc:docMkLst>
       <pc:sldChg chg="addSp modSp mod">
-        <pc:chgData name="Andrew Stone (Nokia)" userId="5e693d72-0831-418e-b3bc-937f682be9d6" providerId="ADAL" clId="{23AA7552-9185-5EEB-9431-C2796A246E54}" dt="2026-06-29T18:14:00.257" v="3714" actId="767"/>
+        <pc:chgData name="Andrew Stone (Nokia)" userId="5e693d72-0831-418e-b3bc-937f682be9d6" providerId="ADAL" clId="{23AA7552-9185-5EEB-9431-C2796A246E54}" dt="2026-07-20T12:41:00.249" v="6249"/>
         <pc:sldMkLst>
           <pc:docMk/>
           <pc:sldMk cId="705808974" sldId="256"/>
         </pc:sldMkLst>
         <pc:spChg chg="mod">
-          <ac:chgData name="Andrew Stone (Nokia)" userId="5e693d72-0831-418e-b3bc-937f682be9d6" providerId="ADAL" clId="{23AA7552-9185-5EEB-9431-C2796A246E54}" dt="2026-06-29T18:13:58.017" v="3710" actId="1036"/>
-          <ac:spMkLst>
-            <pc:docMk/>
-            <pc:sldMk cId="705808974" sldId="256"/>
-            <ac:spMk id="2" creationId="{8BC79E0D-E053-2444-A769-A0F98DD7DB3B}"/>
-          </ac:spMkLst>
-        </pc:spChg>
-        <pc:spChg chg="mod">
-          <ac:chgData name="Andrew Stone (Nokia)" userId="5e693d72-0831-418e-b3bc-937f682be9d6" providerId="ADAL" clId="{23AA7552-9185-5EEB-9431-C2796A246E54}" dt="2026-06-29T18:13:38.273" v="3709" actId="20577"/>
+          <ac:chgData name="Andrew Stone (Nokia)" userId="5e693d72-0831-418e-b3bc-937f682be9d6" providerId="ADAL" clId="{23AA7552-9185-5EEB-9431-C2796A246E54}" dt="2026-07-17T21:58:30.317" v="6049" actId="115"/>
           <ac:spMkLst>
             <pc:docMk/>
             <pc:sldMk cId="705808974" sldId="256"/>
             <ac:spMk id="3" creationId="{3233BED0-9E8D-D245-BFB1-5A14FC050A6D}"/>
           </ac:spMkLst>
         </pc:spChg>
-        <pc:spChg chg="add mod">
-          <ac:chgData name="Andrew Stone (Nokia)" userId="5e693d72-0831-418e-b3bc-937f682be9d6" providerId="ADAL" clId="{23AA7552-9185-5EEB-9431-C2796A246E54}" dt="2026-06-29T18:14:00.257" v="3714" actId="767"/>
+        <pc:spChg chg="mod">
+          <ac:chgData name="Andrew Stone (Nokia)" userId="5e693d72-0831-418e-b3bc-937f682be9d6" providerId="ADAL" clId="{23AA7552-9185-5EEB-9431-C2796A246E54}" dt="2026-07-20T12:41:00.249" v="6249"/>
           <ac:spMkLst>
             <pc:docMk/>
             <pc:sldMk cId="705808974" sldId="256"/>
-            <ac:spMk id="6" creationId="{9797716D-C48C-4978-2101-DF8CCD932B1D}"/>
+            <ac:spMk id="4" creationId="{212D715C-4ACC-1948-821B-9DA38B3DB0BA}"/>
           </ac:spMkLst>
         </pc:spChg>
       </pc:sldChg>
-      <pc:sldChg chg="addSp delSp modSp mod">
-        <pc:chgData name="Andrew Stone (Nokia)" userId="5e693d72-0831-418e-b3bc-937f682be9d6" providerId="ADAL" clId="{23AA7552-9185-5EEB-9431-C2796A246E54}" dt="2026-06-29T19:22:14.079" v="5872" actId="20577"/>
-        <pc:sldMkLst>
-          <pc:docMk/>
-          <pc:sldMk cId="2754887948" sldId="260"/>
-        </pc:sldMkLst>
-        <pc:spChg chg="mod">
-          <ac:chgData name="Andrew Stone (Nokia)" userId="5e693d72-0831-418e-b3bc-937f682be9d6" providerId="ADAL" clId="{23AA7552-9185-5EEB-9431-C2796A246E54}" dt="2026-06-29T19:02:55.042" v="4640" actId="20577"/>
-          <ac:spMkLst>
-            <pc:docMk/>
-            <pc:sldMk cId="2754887948" sldId="260"/>
-            <ac:spMk id="2" creationId="{E528D8B7-87FA-A34B-B533-5600A141A8E0}"/>
-          </ac:spMkLst>
-        </pc:spChg>
-        <pc:spChg chg="mod">
-          <ac:chgData name="Andrew Stone (Nokia)" userId="5e693d72-0831-418e-b3bc-937f682be9d6" providerId="ADAL" clId="{23AA7552-9185-5EEB-9431-C2796A246E54}" dt="2026-06-29T19:02:28.585" v="4621" actId="1076"/>
-          <ac:spMkLst>
-            <pc:docMk/>
-            <pc:sldMk cId="2754887948" sldId="260"/>
-            <ac:spMk id="3" creationId="{B2C1735C-A9C4-F3D4-A907-3F466B857C94}"/>
-          </ac:spMkLst>
-        </pc:spChg>
-        <pc:spChg chg="add del mod">
-          <ac:chgData name="Andrew Stone (Nokia)" userId="5e693d72-0831-418e-b3bc-937f682be9d6" providerId="ADAL" clId="{23AA7552-9185-5EEB-9431-C2796A246E54}" dt="2026-06-29T19:01:40.801" v="4514" actId="478"/>
-          <ac:spMkLst>
-            <pc:docMk/>
-            <pc:sldMk cId="2754887948" sldId="260"/>
-            <ac:spMk id="5" creationId="{8886FE65-793E-159A-64B8-4ADACADBC222}"/>
-          </ac:spMkLst>
-        </pc:spChg>
-        <pc:spChg chg="add del mod">
-          <ac:chgData name="Andrew Stone (Nokia)" userId="5e693d72-0831-418e-b3bc-937f682be9d6" providerId="ADAL" clId="{23AA7552-9185-5EEB-9431-C2796A246E54}" dt="2026-06-29T19:01:40.801" v="4514" actId="478"/>
-          <ac:spMkLst>
-            <pc:docMk/>
-            <pc:sldMk cId="2754887948" sldId="260"/>
-            <ac:spMk id="7" creationId="{5D358BD1-82D9-5CA4-9D62-35B3C1E78D9D}"/>
-          </ac:spMkLst>
-        </pc:spChg>
-        <pc:spChg chg="add del mod">
-          <ac:chgData name="Andrew Stone (Nokia)" userId="5e693d72-0831-418e-b3bc-937f682be9d6" providerId="ADAL" clId="{23AA7552-9185-5EEB-9431-C2796A246E54}" dt="2026-06-29T19:01:40.801" v="4514" actId="478"/>
-          <ac:spMkLst>
-            <pc:docMk/>
-            <pc:sldMk cId="2754887948" sldId="260"/>
-            <ac:spMk id="8" creationId="{5CEFC639-4586-C5B1-311E-F70FA7475285}"/>
-          </ac:spMkLst>
-        </pc:spChg>
-        <pc:spChg chg="add mod">
-          <ac:chgData name="Andrew Stone (Nokia)" userId="5e693d72-0831-418e-b3bc-937f682be9d6" providerId="ADAL" clId="{23AA7552-9185-5EEB-9431-C2796A246E54}" dt="2026-06-29T18:24:37.985" v="4327" actId="1076"/>
-          <ac:spMkLst>
-            <pc:docMk/>
-            <pc:sldMk cId="2754887948" sldId="260"/>
-            <ac:spMk id="9" creationId="{AD652872-62EE-3054-70A2-556E5B2EE36B}"/>
-          </ac:spMkLst>
-        </pc:spChg>
-        <pc:spChg chg="add del mod">
-          <ac:chgData name="Andrew Stone (Nokia)" userId="5e693d72-0831-418e-b3bc-937f682be9d6" providerId="ADAL" clId="{23AA7552-9185-5EEB-9431-C2796A246E54}" dt="2026-06-29T19:01:40.801" v="4514" actId="478"/>
-          <ac:spMkLst>
-            <pc:docMk/>
-            <pc:sldMk cId="2754887948" sldId="260"/>
-            <ac:spMk id="10" creationId="{EB61B378-9A15-16B3-EB2D-A35303C9DB1B}"/>
-          </ac:spMkLst>
-        </pc:spChg>
-        <pc:spChg chg="mod">
-          <ac:chgData name="Andrew Stone (Nokia)" userId="5e693d72-0831-418e-b3bc-937f682be9d6" providerId="ADAL" clId="{23AA7552-9185-5EEB-9431-C2796A246E54}" dt="2026-06-29T18:21:16.657" v="4143" actId="692"/>
-          <ac:spMkLst>
-            <pc:docMk/>
-            <pc:sldMk cId="2754887948" sldId="260"/>
-            <ac:spMk id="11" creationId="{2287510D-1B49-D69D-4AD1-A84B43CC0647}"/>
-          </ac:spMkLst>
-        </pc:spChg>
-        <pc:spChg chg="add del mod">
-          <ac:chgData name="Andrew Stone (Nokia)" userId="5e693d72-0831-418e-b3bc-937f682be9d6" providerId="ADAL" clId="{23AA7552-9185-5EEB-9431-C2796A246E54}" dt="2026-06-29T19:01:40.801" v="4514" actId="478"/>
-          <ac:spMkLst>
-            <pc:docMk/>
-            <pc:sldMk cId="2754887948" sldId="260"/>
-            <ac:spMk id="13" creationId="{CE608410-0AC4-B56A-3DD6-A2E35428B428}"/>
-          </ac:spMkLst>
-        </pc:spChg>
-        <pc:spChg chg="add del mod">
-          <ac:chgData name="Andrew Stone (Nokia)" userId="5e693d72-0831-418e-b3bc-937f682be9d6" providerId="ADAL" clId="{23AA7552-9185-5EEB-9431-C2796A246E54}" dt="2026-06-29T18:21:41.584" v="4148" actId="478"/>
-          <ac:spMkLst>
-            <pc:docMk/>
-            <pc:sldMk cId="2754887948" sldId="260"/>
-            <ac:spMk id="14" creationId="{17AF30EE-C2BA-B1A9-5841-EF5C11483D98}"/>
-          </ac:spMkLst>
-        </pc:spChg>
-        <pc:spChg chg="mod">
-          <ac:chgData name="Andrew Stone (Nokia)" userId="5e693d72-0831-418e-b3bc-937f682be9d6" providerId="ADAL" clId="{23AA7552-9185-5EEB-9431-C2796A246E54}" dt="2026-06-29T18:24:50.805" v="4331" actId="14100"/>
-          <ac:spMkLst>
-            <pc:docMk/>
-            <pc:sldMk cId="2754887948" sldId="260"/>
-            <ac:spMk id="15" creationId="{39994F9A-E3BD-98F2-5B2A-DE08D6877245}"/>
-          </ac:spMkLst>
-        </pc:spChg>
-        <pc:spChg chg="mod">
-          <ac:chgData name="Andrew Stone (Nokia)" userId="5e693d72-0831-418e-b3bc-937f682be9d6" providerId="ADAL" clId="{23AA7552-9185-5EEB-9431-C2796A246E54}" dt="2026-06-29T18:24:43.223" v="4328" actId="14100"/>
-          <ac:spMkLst>
-            <pc:docMk/>
-            <pc:sldMk cId="2754887948" sldId="260"/>
-            <ac:spMk id="16" creationId="{223BA054-AA13-F4FC-D97C-35E724B524E4}"/>
-          </ac:spMkLst>
-        </pc:spChg>
-        <pc:spChg chg="mod">
-          <ac:chgData name="Andrew Stone (Nokia)" userId="5e693d72-0831-418e-b3bc-937f682be9d6" providerId="ADAL" clId="{23AA7552-9185-5EEB-9431-C2796A246E54}" dt="2026-06-29T18:24:45.260" v="4329" actId="14100"/>
-          <ac:spMkLst>
-            <pc:docMk/>
-            <pc:sldMk cId="2754887948" sldId="260"/>
-            <ac:spMk id="17" creationId="{B1244F5C-C259-CA30-DA58-83762027D4F0}"/>
-          </ac:spMkLst>
-        </pc:spChg>
-        <pc:spChg chg="mod">
-          <ac:chgData name="Andrew Stone (Nokia)" userId="5e693d72-0831-418e-b3bc-937f682be9d6" providerId="ADAL" clId="{23AA7552-9185-5EEB-9431-C2796A246E54}" dt="2026-06-29T18:23:43.788" v="4320" actId="207"/>
-          <ac:spMkLst>
-            <pc:docMk/>
-            <pc:sldMk cId="2754887948" sldId="260"/>
-            <ac:spMk id="18" creationId="{89DD2DED-EA88-4EC4-3461-A3E5F327915E}"/>
-          </ac:spMkLst>
-        </pc:spChg>
-        <pc:spChg chg="add del mod">
-          <ac:chgData name="Andrew Stone (Nokia)" userId="5e693d72-0831-418e-b3bc-937f682be9d6" providerId="ADAL" clId="{23AA7552-9185-5EEB-9431-C2796A246E54}" dt="2026-06-29T18:21:50.090" v="4152" actId="478"/>
-          <ac:spMkLst>
-            <pc:docMk/>
-            <pc:sldMk cId="2754887948" sldId="260"/>
-            <ac:spMk id="19" creationId="{828CAE28-911D-37EF-7CB6-7193C8D9141D}"/>
-          </ac:spMkLst>
-        </pc:spChg>
-        <pc:spChg chg="mod">
-          <ac:chgData name="Andrew Stone (Nokia)" userId="5e693d72-0831-418e-b3bc-937f682be9d6" providerId="ADAL" clId="{23AA7552-9185-5EEB-9431-C2796A246E54}" dt="2026-06-29T19:04:20.418" v="4679" actId="20577"/>
-          <ac:spMkLst>
-            <pc:docMk/>
-            <pc:sldMk cId="2754887948" sldId="260"/>
-            <ac:spMk id="20" creationId="{0931796B-1FD3-5E48-83E4-DEBB9AFDB1D5}"/>
-          </ac:spMkLst>
-        </pc:spChg>
-        <pc:spChg chg="mod">
-          <ac:chgData name="Andrew Stone (Nokia)" userId="5e693d72-0831-418e-b3bc-937f682be9d6" providerId="ADAL" clId="{23AA7552-9185-5EEB-9431-C2796A246E54}" dt="2026-06-29T18:25:40.993" v="4351" actId="14100"/>
-          <ac:spMkLst>
-            <pc:docMk/>
-            <pc:sldMk cId="2754887948" sldId="260"/>
-            <ac:spMk id="21" creationId="{3633BE6E-A3CD-5414-B243-AC57183E6C07}"/>
-          </ac:spMkLst>
-        </pc:spChg>
-        <pc:spChg chg="add del mod">
-          <ac:chgData name="Andrew Stone (Nokia)" userId="5e693d72-0831-418e-b3bc-937f682be9d6" providerId="ADAL" clId="{23AA7552-9185-5EEB-9431-C2796A246E54}" dt="2026-06-29T19:01:40.801" v="4514" actId="478"/>
-          <ac:spMkLst>
-            <pc:docMk/>
-            <pc:sldMk cId="2754887948" sldId="260"/>
-            <ac:spMk id="22" creationId="{1AA9331F-F2BB-A07B-F1B6-E25AE22858D7}"/>
-          </ac:spMkLst>
-        </pc:spChg>
-        <pc:spChg chg="add del mod">
-          <ac:chgData name="Andrew Stone (Nokia)" userId="5e693d72-0831-418e-b3bc-937f682be9d6" providerId="ADAL" clId="{23AA7552-9185-5EEB-9431-C2796A246E54}" dt="2026-06-29T19:01:40.801" v="4514" actId="478"/>
-          <ac:spMkLst>
-            <pc:docMk/>
-            <pc:sldMk cId="2754887948" sldId="260"/>
-            <ac:spMk id="23" creationId="{57DAAE8C-4FD5-DB01-E23B-275C6B3CA47B}"/>
-          </ac:spMkLst>
-        </pc:spChg>
-        <pc:spChg chg="mod">
-          <ac:chgData name="Andrew Stone (Nokia)" userId="5e693d72-0831-418e-b3bc-937f682be9d6" providerId="ADAL" clId="{23AA7552-9185-5EEB-9431-C2796A246E54}" dt="2026-06-29T18:25:34.976" v="4349" actId="14100"/>
-          <ac:spMkLst>
-            <pc:docMk/>
-            <pc:sldMk cId="2754887948" sldId="260"/>
-            <ac:spMk id="24" creationId="{A38F66E7-906A-BFCC-7815-4CEC563CE53E}"/>
-          </ac:spMkLst>
-        </pc:spChg>
-        <pc:spChg chg="mod">
-          <ac:chgData name="Andrew Stone (Nokia)" userId="5e693d72-0831-418e-b3bc-937f682be9d6" providerId="ADAL" clId="{23AA7552-9185-5EEB-9431-C2796A246E54}" dt="2026-06-29T18:22:55.108" v="4298" actId="207"/>
-          <ac:spMkLst>
-            <pc:docMk/>
-            <pc:sldMk cId="2754887948" sldId="260"/>
-            <ac:spMk id="25" creationId="{B6B76B61-D1C5-1556-D088-35EE51069102}"/>
-          </ac:spMkLst>
-        </pc:spChg>
-        <pc:spChg chg="add mod">
-          <ac:chgData name="Andrew Stone (Nokia)" userId="5e693d72-0831-418e-b3bc-937f682be9d6" providerId="ADAL" clId="{23AA7552-9185-5EEB-9431-C2796A246E54}" dt="2026-06-29T18:22:55.108" v="4298" actId="207"/>
-          <ac:spMkLst>
-            <pc:docMk/>
-            <pc:sldMk cId="2754887948" sldId="260"/>
-            <ac:spMk id="26" creationId="{FAA1F00B-FC17-5BA5-FE62-0844B17879E2}"/>
-          </ac:spMkLst>
-        </pc:spChg>
-        <pc:spChg chg="add mod">
-          <ac:chgData name="Andrew Stone (Nokia)" userId="5e693d72-0831-418e-b3bc-937f682be9d6" providerId="ADAL" clId="{23AA7552-9185-5EEB-9431-C2796A246E54}" dt="2026-06-29T18:22:55.108" v="4298" actId="207"/>
-          <ac:spMkLst>
-            <pc:docMk/>
-            <pc:sldMk cId="2754887948" sldId="260"/>
-            <ac:spMk id="27" creationId="{97F76246-7365-A77A-68CB-2B0E29AF68C4}"/>
-          </ac:spMkLst>
-        </pc:spChg>
-        <pc:spChg chg="add del mod">
-          <ac:chgData name="Andrew Stone (Nokia)" userId="5e693d72-0831-418e-b3bc-937f682be9d6" providerId="ADAL" clId="{23AA7552-9185-5EEB-9431-C2796A246E54}" dt="2026-06-29T19:01:40.801" v="4514" actId="478"/>
-          <ac:spMkLst>
-            <pc:docMk/>
-            <pc:sldMk cId="2754887948" sldId="260"/>
-            <ac:spMk id="28" creationId="{291D62AB-D3BD-D5EE-9DE3-9993FDEED022}"/>
-          </ac:spMkLst>
-        </pc:spChg>
-        <pc:spChg chg="add del mod">
-          <ac:chgData name="Andrew Stone (Nokia)" userId="5e693d72-0831-418e-b3bc-937f682be9d6" providerId="ADAL" clId="{23AA7552-9185-5EEB-9431-C2796A246E54}" dt="2026-06-29T18:23:24.274" v="4313" actId="478"/>
-          <ac:spMkLst>
-            <pc:docMk/>
-            <pc:sldMk cId="2754887948" sldId="260"/>
-            <ac:spMk id="29" creationId="{C8E4743B-535D-B287-5E00-E9DB175986DD}"/>
-          </ac:spMkLst>
-        </pc:spChg>
-        <pc:spChg chg="add del mod">
-          <ac:chgData name="Andrew Stone (Nokia)" userId="5e693d72-0831-418e-b3bc-937f682be9d6" providerId="ADAL" clId="{23AA7552-9185-5EEB-9431-C2796A246E54}" dt="2026-06-29T19:01:40.801" v="4514" actId="478"/>
-          <ac:spMkLst>
-            <pc:docMk/>
-            <pc:sldMk cId="2754887948" sldId="260"/>
-            <ac:spMk id="30" creationId="{9F2400D5-20D3-4D0D-FD63-17C072D9DC28}"/>
-          </ac:spMkLst>
-        </pc:spChg>
-        <pc:spChg chg="add del mod">
-          <ac:chgData name="Andrew Stone (Nokia)" userId="5e693d72-0831-418e-b3bc-937f682be9d6" providerId="ADAL" clId="{23AA7552-9185-5EEB-9431-C2796A246E54}" dt="2026-06-29T19:01:40.801" v="4514" actId="478"/>
-          <ac:spMkLst>
-            <pc:docMk/>
-            <pc:sldMk cId="2754887948" sldId="260"/>
-            <ac:spMk id="31" creationId="{7B73E9E6-8626-6E61-6C3A-3521BCD66696}"/>
-          </ac:spMkLst>
-        </pc:spChg>
-        <pc:spChg chg="add mod">
-          <ac:chgData name="Andrew Stone (Nokia)" userId="5e693d72-0831-418e-b3bc-937f682be9d6" providerId="ADAL" clId="{23AA7552-9185-5EEB-9431-C2796A246E54}" dt="2026-06-29T18:25:24.652" v="4347" actId="14100"/>
-          <ac:spMkLst>
-            <pc:docMk/>
-            <pc:sldMk cId="2754887948" sldId="260"/>
-            <ac:spMk id="32" creationId="{08D3956E-1CD0-0F4B-C209-F9A94B986DA4}"/>
-          </ac:spMkLst>
-        </pc:spChg>
-        <pc:spChg chg="add del mod">
-          <ac:chgData name="Andrew Stone (Nokia)" userId="5e693d72-0831-418e-b3bc-937f682be9d6" providerId="ADAL" clId="{23AA7552-9185-5EEB-9431-C2796A246E54}" dt="2026-06-29T19:01:41.754" v="4515" actId="478"/>
-          <ac:spMkLst>
-            <pc:docMk/>
-            <pc:sldMk cId="2754887948" sldId="260"/>
-            <ac:spMk id="34" creationId="{30270E95-0C2E-866E-1E47-B5DCE42E6615}"/>
-          </ac:spMkLst>
-        </pc:spChg>
-        <pc:spChg chg="add del mod">
-          <ac:chgData name="Andrew Stone (Nokia)" userId="5e693d72-0831-418e-b3bc-937f682be9d6" providerId="ADAL" clId="{23AA7552-9185-5EEB-9431-C2796A246E54}" dt="2026-06-29T19:01:41.754" v="4515" actId="478"/>
-          <ac:spMkLst>
-            <pc:docMk/>
-            <pc:sldMk cId="2754887948" sldId="260"/>
-            <ac:spMk id="40" creationId="{D005E8DB-5372-8290-129B-9A0199ACD974}"/>
-          </ac:spMkLst>
-        </pc:spChg>
-        <pc:spChg chg="add del mod">
-          <ac:chgData name="Andrew Stone (Nokia)" userId="5e693d72-0831-418e-b3bc-937f682be9d6" providerId="ADAL" clId="{23AA7552-9185-5EEB-9431-C2796A246E54}" dt="2026-06-29T19:01:41.754" v="4515" actId="478"/>
-          <ac:spMkLst>
-            <pc:docMk/>
-            <pc:sldMk cId="2754887948" sldId="260"/>
-            <ac:spMk id="41" creationId="{8AB53A97-9D0F-256F-C7D4-DE778ADEC5A6}"/>
-          </ac:spMkLst>
-        </pc:spChg>
-        <pc:spChg chg="add del mod">
-          <ac:chgData name="Andrew Stone (Nokia)" userId="5e693d72-0831-418e-b3bc-937f682be9d6" providerId="ADAL" clId="{23AA7552-9185-5EEB-9431-C2796A246E54}" dt="2026-06-29T19:01:41.754" v="4515" actId="478"/>
-          <ac:spMkLst>
-            <pc:docMk/>
-            <pc:sldMk cId="2754887948" sldId="260"/>
-            <ac:spMk id="44" creationId="{8A4E79A9-E065-C5EF-77D6-09A7E971A200}"/>
-          </ac:spMkLst>
-        </pc:spChg>
-        <pc:spChg chg="add del mod">
-          <ac:chgData name="Andrew Stone (Nokia)" userId="5e693d72-0831-418e-b3bc-937f682be9d6" providerId="ADAL" clId="{23AA7552-9185-5EEB-9431-C2796A246E54}" dt="2026-06-29T19:01:41.754" v="4515" actId="478"/>
-          <ac:spMkLst>
-            <pc:docMk/>
-            <pc:sldMk cId="2754887948" sldId="260"/>
-            <ac:spMk id="45" creationId="{8A836CBE-1191-459F-20B6-BB14EF6075F3}"/>
-          </ac:spMkLst>
-        </pc:spChg>
-        <pc:spChg chg="add del mod">
-          <ac:chgData name="Andrew Stone (Nokia)" userId="5e693d72-0831-418e-b3bc-937f682be9d6" providerId="ADAL" clId="{23AA7552-9185-5EEB-9431-C2796A246E54}" dt="2026-06-29T19:01:41.754" v="4515" actId="478"/>
-          <ac:spMkLst>
-            <pc:docMk/>
-            <pc:sldMk cId="2754887948" sldId="260"/>
-            <ac:spMk id="46" creationId="{D47E9B84-7D68-1D99-6985-CF35AB813222}"/>
-          </ac:spMkLst>
-        </pc:spChg>
-        <pc:spChg chg="add del mod">
-          <ac:chgData name="Andrew Stone (Nokia)" userId="5e693d72-0831-418e-b3bc-937f682be9d6" providerId="ADAL" clId="{23AA7552-9185-5EEB-9431-C2796A246E54}" dt="2026-06-29T19:01:41.754" v="4515" actId="478"/>
-          <ac:spMkLst>
-            <pc:docMk/>
-            <pc:sldMk cId="2754887948" sldId="260"/>
-            <ac:spMk id="47" creationId="{D7904D36-99C1-536A-A886-647349EE3031}"/>
-          </ac:spMkLst>
-        </pc:spChg>
-        <pc:spChg chg="add del mod">
-          <ac:chgData name="Andrew Stone (Nokia)" userId="5e693d72-0831-418e-b3bc-937f682be9d6" providerId="ADAL" clId="{23AA7552-9185-5EEB-9431-C2796A246E54}" dt="2026-06-29T19:01:41.754" v="4515" actId="478"/>
-          <ac:spMkLst>
-            <pc:docMk/>
-            <pc:sldMk cId="2754887948" sldId="260"/>
-            <ac:spMk id="48" creationId="{90DF7DFD-CDC9-6B76-C541-2E0134CFADC3}"/>
-          </ac:spMkLst>
-        </pc:spChg>
-        <pc:spChg chg="add del mod">
-          <ac:chgData name="Andrew Stone (Nokia)" userId="5e693d72-0831-418e-b3bc-937f682be9d6" providerId="ADAL" clId="{23AA7552-9185-5EEB-9431-C2796A246E54}" dt="2026-06-29T19:01:41.754" v="4515" actId="478"/>
-          <ac:spMkLst>
-            <pc:docMk/>
-            <pc:sldMk cId="2754887948" sldId="260"/>
-            <ac:spMk id="51" creationId="{C0851E18-2F48-9610-443C-4C8833DC2A3C}"/>
-          </ac:spMkLst>
-        </pc:spChg>
-        <pc:spChg chg="add del mod">
-          <ac:chgData name="Andrew Stone (Nokia)" userId="5e693d72-0831-418e-b3bc-937f682be9d6" providerId="ADAL" clId="{23AA7552-9185-5EEB-9431-C2796A246E54}" dt="2026-06-29T19:01:41.754" v="4515" actId="478"/>
-          <ac:spMkLst>
-            <pc:docMk/>
-            <pc:sldMk cId="2754887948" sldId="260"/>
-            <ac:spMk id="52" creationId="{A6336708-5DF0-C6AA-71B3-1BB4CA6BF702}"/>
-          </ac:spMkLst>
-        </pc:spChg>
-        <pc:spChg chg="add del mod">
-          <ac:chgData name="Andrew Stone (Nokia)" userId="5e693d72-0831-418e-b3bc-937f682be9d6" providerId="ADAL" clId="{23AA7552-9185-5EEB-9431-C2796A246E54}" dt="2026-06-29T19:03:04.614" v="4650" actId="478"/>
-          <ac:spMkLst>
-            <pc:docMk/>
-            <pc:sldMk cId="2754887948" sldId="260"/>
-            <ac:spMk id="55" creationId="{83BDA4AF-D9C1-49F8-761C-28951D0055DE}"/>
-          </ac:spMkLst>
-        </pc:spChg>
-        <pc:spChg chg="add del mod">
-          <ac:chgData name="Andrew Stone (Nokia)" userId="5e693d72-0831-418e-b3bc-937f682be9d6" providerId="ADAL" clId="{23AA7552-9185-5EEB-9431-C2796A246E54}" dt="2026-06-29T19:03:04.614" v="4650" actId="478"/>
-          <ac:spMkLst>
-            <pc:docMk/>
-            <pc:sldMk cId="2754887948" sldId="260"/>
-            <ac:spMk id="56" creationId="{CBCFE324-545B-89A4-D6AB-7D2C8D87E1AD}"/>
-          </ac:spMkLst>
-        </pc:spChg>
-        <pc:spChg chg="add del mod">
-          <ac:chgData name="Andrew Stone (Nokia)" userId="5e693d72-0831-418e-b3bc-937f682be9d6" providerId="ADAL" clId="{23AA7552-9185-5EEB-9431-C2796A246E54}" dt="2026-06-29T19:03:04.614" v="4650" actId="478"/>
-          <ac:spMkLst>
-            <pc:docMk/>
-            <pc:sldMk cId="2754887948" sldId="260"/>
-            <ac:spMk id="57" creationId="{40A26484-67D2-FDD4-B0C6-A0A9E6950707}"/>
-          </ac:spMkLst>
-        </pc:spChg>
-        <pc:spChg chg="del mod">
-          <ac:chgData name="Andrew Stone (Nokia)" userId="5e693d72-0831-418e-b3bc-937f682be9d6" providerId="ADAL" clId="{23AA7552-9185-5EEB-9431-C2796A246E54}" dt="2026-06-29T19:03:04.614" v="4650" actId="478"/>
-          <ac:spMkLst>
-            <pc:docMk/>
-            <pc:sldMk cId="2754887948" sldId="260"/>
-            <ac:spMk id="66" creationId="{7CA5603B-80A7-55B9-F979-5B8677BBE406}"/>
-          </ac:spMkLst>
-        </pc:spChg>
-        <pc:spChg chg="add del mod">
-          <ac:chgData name="Andrew Stone (Nokia)" userId="5e693d72-0831-418e-b3bc-937f682be9d6" providerId="ADAL" clId="{23AA7552-9185-5EEB-9431-C2796A246E54}" dt="2026-06-29T19:03:04.614" v="4650" actId="478"/>
-          <ac:spMkLst>
-            <pc:docMk/>
-            <pc:sldMk cId="2754887948" sldId="260"/>
-            <ac:spMk id="67" creationId="{6F844643-24BA-6629-225A-42D253800AB8}"/>
-          </ac:spMkLst>
-        </pc:spChg>
-        <pc:spChg chg="add del mod">
-          <ac:chgData name="Andrew Stone (Nokia)" userId="5e693d72-0831-418e-b3bc-937f682be9d6" providerId="ADAL" clId="{23AA7552-9185-5EEB-9431-C2796A246E54}" dt="2026-06-29T19:03:04.614" v="4650" actId="478"/>
-          <ac:spMkLst>
-            <pc:docMk/>
-            <pc:sldMk cId="2754887948" sldId="260"/>
-            <ac:spMk id="68" creationId="{20749085-AF13-3C47-B858-4F372A0DFCBA}"/>
-          </ac:spMkLst>
-        </pc:spChg>
-        <pc:spChg chg="del">
-          <ac:chgData name="Andrew Stone (Nokia)" userId="5e693d72-0831-418e-b3bc-937f682be9d6" providerId="ADAL" clId="{23AA7552-9185-5EEB-9431-C2796A246E54}" dt="2026-06-29T19:03:04.614" v="4650" actId="478"/>
-          <ac:spMkLst>
-            <pc:docMk/>
-            <pc:sldMk cId="2754887948" sldId="260"/>
-            <ac:spMk id="71" creationId="{106E57D8-BBDB-476F-24E5-D43DDEEE21A8}"/>
-          </ac:spMkLst>
-        </pc:spChg>
-        <pc:spChg chg="add del mod">
-          <ac:chgData name="Andrew Stone (Nokia)" userId="5e693d72-0831-418e-b3bc-937f682be9d6" providerId="ADAL" clId="{23AA7552-9185-5EEB-9431-C2796A246E54}" dt="2026-06-29T19:03:04.614" v="4650" actId="478"/>
-          <ac:spMkLst>
-            <pc:docMk/>
-            <pc:sldMk cId="2754887948" sldId="260"/>
-            <ac:spMk id="72" creationId="{BEB9A9CB-F155-96E5-0224-683E055EF492}"/>
-          </ac:spMkLst>
-        </pc:spChg>
-        <pc:spChg chg="add del mod">
-          <ac:chgData name="Andrew Stone (Nokia)" userId="5e693d72-0831-418e-b3bc-937f682be9d6" providerId="ADAL" clId="{23AA7552-9185-5EEB-9431-C2796A246E54}" dt="2026-06-29T19:03:04.614" v="4650" actId="478"/>
-          <ac:spMkLst>
-            <pc:docMk/>
-            <pc:sldMk cId="2754887948" sldId="260"/>
-            <ac:spMk id="73" creationId="{AA9F8091-51E3-B630-C3A9-47B3A104B981}"/>
-          </ac:spMkLst>
-        </pc:spChg>
-        <pc:spChg chg="add del mod">
-          <ac:chgData name="Andrew Stone (Nokia)" userId="5e693d72-0831-418e-b3bc-937f682be9d6" providerId="ADAL" clId="{23AA7552-9185-5EEB-9431-C2796A246E54}" dt="2026-06-29T19:03:04.614" v="4650" actId="478"/>
-          <ac:spMkLst>
-            <pc:docMk/>
-            <pc:sldMk cId="2754887948" sldId="260"/>
-            <ac:spMk id="74" creationId="{19CB0952-F8EF-A2AC-C776-87D850D265C0}"/>
-          </ac:spMkLst>
-        </pc:spChg>
-        <pc:spChg chg="add mod">
-          <ac:chgData name="Andrew Stone (Nokia)" userId="5e693d72-0831-418e-b3bc-937f682be9d6" providerId="ADAL" clId="{23AA7552-9185-5EEB-9431-C2796A246E54}" dt="2026-06-29T19:04:07.631" v="4672" actId="1076"/>
-          <ac:spMkLst>
-            <pc:docMk/>
-            <pc:sldMk cId="2754887948" sldId="260"/>
-            <ac:spMk id="75" creationId="{73D6B9E1-AB5D-6DF8-DC5E-2F8D00D03721}"/>
-          </ac:spMkLst>
-        </pc:spChg>
-        <pc:spChg chg="add del mod">
-          <ac:chgData name="Andrew Stone (Nokia)" userId="5e693d72-0831-418e-b3bc-937f682be9d6" providerId="ADAL" clId="{23AA7552-9185-5EEB-9431-C2796A246E54}" dt="2026-06-29T19:02:03.302" v="4557" actId="478"/>
-          <ac:spMkLst>
-            <pc:docMk/>
-            <pc:sldMk cId="2754887948" sldId="260"/>
-            <ac:spMk id="77" creationId="{2148E17B-6E87-CBD6-4006-637189C53092}"/>
-          </ac:spMkLst>
-        </pc:spChg>
-        <pc:spChg chg="add mod">
-          <ac:chgData name="Andrew Stone (Nokia)" userId="5e693d72-0831-418e-b3bc-937f682be9d6" providerId="ADAL" clId="{23AA7552-9185-5EEB-9431-C2796A246E54}" dt="2026-06-29T19:03:08.298" v="4652" actId="1076"/>
-          <ac:spMkLst>
-            <pc:docMk/>
-            <pc:sldMk cId="2754887948" sldId="260"/>
-            <ac:spMk id="81" creationId="{E6241DE2-FACB-E837-7452-13D53B15B392}"/>
-          </ac:spMkLst>
-        </pc:spChg>
-        <pc:spChg chg="add mod">
-          <ac:chgData name="Andrew Stone (Nokia)" userId="5e693d72-0831-418e-b3bc-937f682be9d6" providerId="ADAL" clId="{23AA7552-9185-5EEB-9431-C2796A246E54}" dt="2026-06-29T19:03:08.298" v="4652" actId="1076"/>
-          <ac:spMkLst>
-            <pc:docMk/>
-            <pc:sldMk cId="2754887948" sldId="260"/>
-            <ac:spMk id="85" creationId="{FCC998ED-6462-FB0A-25D5-6AC8934B493E}"/>
-          </ac:spMkLst>
-        </pc:spChg>
-        <pc:spChg chg="add mod">
-          <ac:chgData name="Andrew Stone (Nokia)" userId="5e693d72-0831-418e-b3bc-937f682be9d6" providerId="ADAL" clId="{23AA7552-9185-5EEB-9431-C2796A246E54}" dt="2026-06-29T19:04:34.025" v="4688" actId="20577"/>
-          <ac:spMkLst>
-            <pc:docMk/>
-            <pc:sldMk cId="2754887948" sldId="260"/>
-            <ac:spMk id="87" creationId="{7B1298D5-5513-8F7E-023A-42F2AFCAE49B}"/>
-          </ac:spMkLst>
-        </pc:spChg>
-        <pc:spChg chg="add mod">
-          <ac:chgData name="Andrew Stone (Nokia)" userId="5e693d72-0831-418e-b3bc-937f682be9d6" providerId="ADAL" clId="{23AA7552-9185-5EEB-9431-C2796A246E54}" dt="2026-06-29T19:04:27.576" v="4682" actId="1076"/>
-          <ac:spMkLst>
-            <pc:docMk/>
-            <pc:sldMk cId="2754887948" sldId="260"/>
-            <ac:spMk id="88" creationId="{EEE1B196-8053-1EDD-DBA6-A46285B46C45}"/>
-          </ac:spMkLst>
-        </pc:spChg>
-        <pc:spChg chg="mod">
-          <ac:chgData name="Andrew Stone (Nokia)" userId="5e693d72-0831-418e-b3bc-937f682be9d6" providerId="ADAL" clId="{23AA7552-9185-5EEB-9431-C2796A246E54}" dt="2026-06-29T19:04:26.578" v="4681" actId="1076"/>
-          <ac:spMkLst>
-            <pc:docMk/>
-            <pc:sldMk cId="2754887948" sldId="260"/>
-            <ac:spMk id="89" creationId="{D51F64D9-5FFD-827B-BDD5-56A994AAB348}"/>
-          </ac:spMkLst>
-        </pc:spChg>
-        <pc:spChg chg="add del mod">
-          <ac:chgData name="Andrew Stone (Nokia)" userId="5e693d72-0831-418e-b3bc-937f682be9d6" providerId="ADAL" clId="{23AA7552-9185-5EEB-9431-C2796A246E54}" dt="2026-06-29T19:03:19.645" v="4661" actId="478"/>
-          <ac:spMkLst>
-            <pc:docMk/>
-            <pc:sldMk cId="2754887948" sldId="260"/>
-            <ac:spMk id="90" creationId="{0A61FB14-63F3-B00D-8C79-E059B8C73221}"/>
-          </ac:spMkLst>
-        </pc:spChg>
-        <pc:spChg chg="del">
-          <ac:chgData name="Andrew Stone (Nokia)" userId="5e693d72-0831-418e-b3bc-937f682be9d6" providerId="ADAL" clId="{23AA7552-9185-5EEB-9431-C2796A246E54}" dt="2026-06-29T19:03:20.615" v="4662" actId="478"/>
-          <ac:spMkLst>
-            <pc:docMk/>
-            <pc:sldMk cId="2754887948" sldId="260"/>
-            <ac:spMk id="91" creationId="{B1CDE03E-ED21-CEAE-54BF-060128E93118}"/>
-          </ac:spMkLst>
-        </pc:spChg>
-        <pc:spChg chg="add del mod">
-          <ac:chgData name="Andrew Stone (Nokia)" userId="5e693d72-0831-418e-b3bc-937f682be9d6" providerId="ADAL" clId="{23AA7552-9185-5EEB-9431-C2796A246E54}" dt="2026-06-29T19:03:15.944" v="4656" actId="478"/>
-          <ac:spMkLst>
-            <pc:docMk/>
-            <pc:sldMk cId="2754887948" sldId="260"/>
-            <ac:spMk id="92" creationId="{9BF917C5-346A-20F5-D640-2064B4FC680A}"/>
-          </ac:spMkLst>
-        </pc:spChg>
-        <pc:spChg chg="add mod">
-          <ac:chgData name="Andrew Stone (Nokia)" userId="5e693d72-0831-418e-b3bc-937f682be9d6" providerId="ADAL" clId="{23AA7552-9185-5EEB-9431-C2796A246E54}" dt="2026-06-29T19:03:08.298" v="4652" actId="1076"/>
-          <ac:spMkLst>
-            <pc:docMk/>
-            <pc:sldMk cId="2754887948" sldId="260"/>
-            <ac:spMk id="95" creationId="{9862234C-A591-FCCD-67C3-D78B5352E403}"/>
-          </ac:spMkLst>
-        </pc:spChg>
-        <pc:spChg chg="add mod">
-          <ac:chgData name="Andrew Stone (Nokia)" userId="5e693d72-0831-418e-b3bc-937f682be9d6" providerId="ADAL" clId="{23AA7552-9185-5EEB-9431-C2796A246E54}" dt="2026-06-29T19:03:34.301" v="4663" actId="1076"/>
-          <ac:spMkLst>
-            <pc:docMk/>
-            <pc:sldMk cId="2754887948" sldId="260"/>
-            <ac:spMk id="96" creationId="{86DE2319-8056-42C3-583D-BD2830DD5868}"/>
-          </ac:spMkLst>
-        </pc:spChg>
-        <pc:spChg chg="del">
-          <ac:chgData name="Andrew Stone (Nokia)" userId="5e693d72-0831-418e-b3bc-937f682be9d6" providerId="ADAL" clId="{23AA7552-9185-5EEB-9431-C2796A246E54}" dt="2026-06-29T19:03:10.261" v="4653" actId="478"/>
-          <ac:spMkLst>
-            <pc:docMk/>
-            <pc:sldMk cId="2754887948" sldId="260"/>
-            <ac:spMk id="97" creationId="{C0B4E2AB-7AAA-A5CE-9EEE-7D53FBB08726}"/>
-          </ac:spMkLst>
-        </pc:spChg>
-        <pc:spChg chg="del">
-          <ac:chgData name="Andrew Stone (Nokia)" userId="5e693d72-0831-418e-b3bc-937f682be9d6" providerId="ADAL" clId="{23AA7552-9185-5EEB-9431-C2796A246E54}" dt="2026-06-29T19:03:15.252" v="4655" actId="478"/>
-          <ac:spMkLst>
-            <pc:docMk/>
-            <pc:sldMk cId="2754887948" sldId="260"/>
-            <ac:spMk id="98" creationId="{4115B808-CD01-8B36-E18A-D204325EC256}"/>
-          </ac:spMkLst>
-        </pc:spChg>
-        <pc:spChg chg="del">
-          <ac:chgData name="Andrew Stone (Nokia)" userId="5e693d72-0831-418e-b3bc-937f682be9d6" providerId="ADAL" clId="{23AA7552-9185-5EEB-9431-C2796A246E54}" dt="2026-06-29T19:03:17.565" v="4658" actId="478"/>
-          <ac:spMkLst>
-            <pc:docMk/>
-            <pc:sldMk cId="2754887948" sldId="260"/>
-            <ac:spMk id="99" creationId="{7F971C0A-8E37-4784-0EC7-6090E95A26D8}"/>
-          </ac:spMkLst>
-        </pc:spChg>
-        <pc:spChg chg="add del mod">
-          <ac:chgData name="Andrew Stone (Nokia)" userId="5e693d72-0831-418e-b3bc-937f682be9d6" providerId="ADAL" clId="{23AA7552-9185-5EEB-9431-C2796A246E54}" dt="2026-06-29T19:03:16.634" v="4657" actId="478"/>
-          <ac:spMkLst>
-            <pc:docMk/>
-            <pc:sldMk cId="2754887948" sldId="260"/>
-            <ac:spMk id="100" creationId="{074E0063-2897-6097-53D7-7CE048A8E739}"/>
-          </ac:spMkLst>
-        </pc:spChg>
-        <pc:spChg chg="add del mod">
-          <ac:chgData name="Andrew Stone (Nokia)" userId="5e693d72-0831-418e-b3bc-937f682be9d6" providerId="ADAL" clId="{23AA7552-9185-5EEB-9431-C2796A246E54}" dt="2026-06-29T19:03:18.010" v="4659" actId="478"/>
-          <ac:spMkLst>
-            <pc:docMk/>
-            <pc:sldMk cId="2754887948" sldId="260"/>
-            <ac:spMk id="101" creationId="{FD4E580C-96F7-F4BB-46AB-C11EA7236731}"/>
-          </ac:spMkLst>
-        </pc:spChg>
-        <pc:spChg chg="del">
-          <ac:chgData name="Andrew Stone (Nokia)" userId="5e693d72-0831-418e-b3bc-937f682be9d6" providerId="ADAL" clId="{23AA7552-9185-5EEB-9431-C2796A246E54}" dt="2026-06-29T19:03:18.597" v="4660" actId="478"/>
-          <ac:spMkLst>
-            <pc:docMk/>
-            <pc:sldMk cId="2754887948" sldId="260"/>
-            <ac:spMk id="102" creationId="{A19AF4F2-B73D-0D4B-5107-D3A2C3A84769}"/>
-          </ac:spMkLst>
-        </pc:spChg>
-        <pc:spChg chg="add mod">
-          <ac:chgData name="Andrew Stone (Nokia)" userId="5e693d72-0831-418e-b3bc-937f682be9d6" providerId="ADAL" clId="{23AA7552-9185-5EEB-9431-C2796A246E54}" dt="2026-06-29T19:05:07.645" v="4717" actId="20577"/>
-          <ac:spMkLst>
-            <pc:docMk/>
-            <pc:sldMk cId="2754887948" sldId="260"/>
-            <ac:spMk id="113" creationId="{E4F32159-CA7E-B100-48F6-4D605B0D4EC8}"/>
-          </ac:spMkLst>
-        </pc:spChg>
-        <pc:spChg chg="add mod">
-          <ac:chgData name="Andrew Stone (Nokia)" userId="5e693d72-0831-418e-b3bc-937f682be9d6" providerId="ADAL" clId="{23AA7552-9185-5EEB-9431-C2796A246E54}" dt="2026-06-29T19:05:04.647" v="4715" actId="1076"/>
-          <ac:spMkLst>
-            <pc:docMk/>
-            <pc:sldMk cId="2754887948" sldId="260"/>
-            <ac:spMk id="114" creationId="{7EC30793-D9B4-EC3F-1501-F4411C916F5D}"/>
-          </ac:spMkLst>
-        </pc:spChg>
-        <pc:spChg chg="add mod">
-          <ac:chgData name="Andrew Stone (Nokia)" userId="5e693d72-0831-418e-b3bc-937f682be9d6" providerId="ADAL" clId="{23AA7552-9185-5EEB-9431-C2796A246E54}" dt="2026-06-29T19:05:15.216" v="4723" actId="20577"/>
-          <ac:spMkLst>
-            <pc:docMk/>
-            <pc:sldMk cId="2754887948" sldId="260"/>
-            <ac:spMk id="115" creationId="{4397E1B7-4CA8-8E71-AE01-09819EBAC2B9}"/>
-          </ac:spMkLst>
-        </pc:spChg>
-        <pc:spChg chg="add mod">
-          <ac:chgData name="Andrew Stone (Nokia)" userId="5e693d72-0831-418e-b3bc-937f682be9d6" providerId="ADAL" clId="{23AA7552-9185-5EEB-9431-C2796A246E54}" dt="2026-06-29T19:05:27.716" v="4735" actId="20577"/>
-          <ac:spMkLst>
-            <pc:docMk/>
-            <pc:sldMk cId="2754887948" sldId="260"/>
-            <ac:spMk id="116" creationId="{010527CD-40BC-C63B-EB85-8B8563634471}"/>
-          </ac:spMkLst>
-        </pc:spChg>
-        <pc:spChg chg="add mod">
-          <ac:chgData name="Andrew Stone (Nokia)" userId="5e693d72-0831-418e-b3bc-937f682be9d6" providerId="ADAL" clId="{23AA7552-9185-5EEB-9431-C2796A246E54}" dt="2026-06-29T19:21:48.959" v="5791" actId="255"/>
-          <ac:spMkLst>
-            <pc:docMk/>
-            <pc:sldMk cId="2754887948" sldId="260"/>
-            <ac:spMk id="117" creationId="{2DBFAD1A-E89E-5B1B-4063-7230D1C877EB}"/>
-          </ac:spMkLst>
-        </pc:spChg>
-        <pc:spChg chg="add mod">
-          <ac:chgData name="Andrew Stone (Nokia)" userId="5e693d72-0831-418e-b3bc-937f682be9d6" providerId="ADAL" clId="{23AA7552-9185-5EEB-9431-C2796A246E54}" dt="2026-06-29T19:21:57.517" v="5821" actId="20577"/>
-          <ac:spMkLst>
-            <pc:docMk/>
-            <pc:sldMk cId="2754887948" sldId="260"/>
-            <ac:spMk id="118" creationId="{436F44BC-AD25-FB17-3FBE-4D38D305668F}"/>
-          </ac:spMkLst>
-        </pc:spChg>
-        <pc:spChg chg="add mod">
-          <ac:chgData name="Andrew Stone (Nokia)" userId="5e693d72-0831-418e-b3bc-937f682be9d6" providerId="ADAL" clId="{23AA7552-9185-5EEB-9431-C2796A246E54}" dt="2026-06-29T19:06:40.879" v="4825" actId="20577"/>
-          <ac:spMkLst>
-            <pc:docMk/>
-            <pc:sldMk cId="2754887948" sldId="260"/>
-            <ac:spMk id="119" creationId="{44F098FC-C237-0403-E8F8-A56BBE96A182}"/>
-          </ac:spMkLst>
-        </pc:spChg>
-        <pc:spChg chg="add mod">
-          <ac:chgData name="Andrew Stone (Nokia)" userId="5e693d72-0831-418e-b3bc-937f682be9d6" providerId="ADAL" clId="{23AA7552-9185-5EEB-9431-C2796A246E54}" dt="2026-06-29T19:06:46.720" v="4829" actId="20577"/>
-          <ac:spMkLst>
-            <pc:docMk/>
-            <pc:sldMk cId="2754887948" sldId="260"/>
-            <ac:spMk id="120" creationId="{724435CF-8F35-1681-8CD5-3FC3D5C491C4}"/>
-          </ac:spMkLst>
-        </pc:spChg>
-        <pc:spChg chg="add del mod">
-          <ac:chgData name="Andrew Stone (Nokia)" userId="5e693d72-0831-418e-b3bc-937f682be9d6" providerId="ADAL" clId="{23AA7552-9185-5EEB-9431-C2796A246E54}" dt="2026-06-29T19:13:07.537" v="5271" actId="478"/>
-          <ac:spMkLst>
-            <pc:docMk/>
-            <pc:sldMk cId="2754887948" sldId="260"/>
-            <ac:spMk id="121" creationId="{AB320FB5-E21D-6724-055E-CB19B178AEFF}"/>
-          </ac:spMkLst>
-        </pc:spChg>
-        <pc:spChg chg="add mod">
-          <ac:chgData name="Andrew Stone (Nokia)" userId="5e693d72-0831-418e-b3bc-937f682be9d6" providerId="ADAL" clId="{23AA7552-9185-5EEB-9431-C2796A246E54}" dt="2026-06-29T19:22:14.079" v="5872" actId="20577"/>
-          <ac:spMkLst>
-            <pc:docMk/>
-            <pc:sldMk cId="2754887948" sldId="260"/>
-            <ac:spMk id="122" creationId="{919619D2-6EF9-003F-595D-6147BCCE4768}"/>
-          </ac:spMkLst>
-        </pc:spChg>
-        <pc:cxnChg chg="mod">
-          <ac:chgData name="Andrew Stone (Nokia)" userId="5e693d72-0831-418e-b3bc-937f682be9d6" providerId="ADAL" clId="{23AA7552-9185-5EEB-9431-C2796A246E54}" dt="2026-06-29T19:04:07.631" v="4672" actId="1076"/>
-          <ac:cxnSpMkLst>
-            <pc:docMk/>
-            <pc:sldMk cId="2754887948" sldId="260"/>
-            <ac:cxnSpMk id="76" creationId="{94C5D670-6E09-F9F7-899C-CC870447E977}"/>
-          </ac:cxnSpMkLst>
-        </pc:cxnChg>
-        <pc:cxnChg chg="add mod">
-          <ac:chgData name="Andrew Stone (Nokia)" userId="5e693d72-0831-418e-b3bc-937f682be9d6" providerId="ADAL" clId="{23AA7552-9185-5EEB-9431-C2796A246E54}" dt="2026-06-29T19:04:07.631" v="4672" actId="1076"/>
-          <ac:cxnSpMkLst>
-            <pc:docMk/>
-            <pc:sldMk cId="2754887948" sldId="260"/>
-            <ac:cxnSpMk id="105" creationId="{518F1C3E-F282-E64D-31F6-B51674E5E028}"/>
-          </ac:cxnSpMkLst>
-        </pc:cxnChg>
-      </pc:sldChg>
       <pc:sldChg chg="modSp mod">
-        <pc:chgData name="Andrew Stone (Nokia)" userId="5e693d72-0831-418e-b3bc-937f682be9d6" providerId="ADAL" clId="{23AA7552-9185-5EEB-9431-C2796A246E54}" dt="2026-06-29T18:16:16.811" v="3948" actId="20577"/>
+        <pc:chgData name="Andrew Stone (Nokia)" userId="5e693d72-0831-418e-b3bc-937f682be9d6" providerId="ADAL" clId="{23AA7552-9185-5EEB-9431-C2796A246E54}" dt="2026-07-18T16:59:49.345" v="6227" actId="20577"/>
         <pc:sldMkLst>
           <pc:docMk/>
           <pc:sldMk cId="975666976" sldId="262"/>
         </pc:sldMkLst>
         <pc:spChg chg="mod">
-          <ac:chgData name="Andrew Stone (Nokia)" userId="5e693d72-0831-418e-b3bc-937f682be9d6" providerId="ADAL" clId="{23AA7552-9185-5EEB-9431-C2796A246E54}" dt="2026-06-29T18:14:05.636" v="3716" actId="20577"/>
-          <ac:spMkLst>
-            <pc:docMk/>
-            <pc:sldMk cId="975666976" sldId="262"/>
-            <ac:spMk id="2" creationId="{2D425DCD-07C8-AC2B-7197-CC0A4DBFE563}"/>
-          </ac:spMkLst>
-        </pc:spChg>
-        <pc:spChg chg="mod">
-          <ac:chgData name="Andrew Stone (Nokia)" userId="5e693d72-0831-418e-b3bc-937f682be9d6" providerId="ADAL" clId="{23AA7552-9185-5EEB-9431-C2796A246E54}" dt="2026-06-29T18:16:16.811" v="3948" actId="20577"/>
+          <ac:chgData name="Andrew Stone (Nokia)" userId="5e693d72-0831-418e-b3bc-937f682be9d6" providerId="ADAL" clId="{23AA7552-9185-5EEB-9431-C2796A246E54}" dt="2026-07-18T16:59:49.345" v="6227" actId="20577"/>
           <ac:spMkLst>
             <pc:docMk/>
             <pc:sldMk cId="975666976" sldId="262"/>
@@ -823,36 +176,14 @@
           </ac:spMkLst>
         </pc:spChg>
       </pc:sldChg>
-      <pc:sldChg chg="modSp mod ord">
-        <pc:chgData name="Andrew Stone (Nokia)" userId="5e693d72-0831-418e-b3bc-937f682be9d6" providerId="ADAL" clId="{23AA7552-9185-5EEB-9431-C2796A246E54}" dt="2026-06-29T19:00:46.040" v="4404" actId="20577"/>
-        <pc:sldMkLst>
-          <pc:docMk/>
-          <pc:sldMk cId="3270141686" sldId="264"/>
-        </pc:sldMkLst>
-        <pc:spChg chg="mod">
-          <ac:chgData name="Andrew Stone (Nokia)" userId="5e693d72-0831-418e-b3bc-937f682be9d6" providerId="ADAL" clId="{23AA7552-9185-5EEB-9431-C2796A246E54}" dt="2026-06-29T19:00:46.040" v="4404" actId="20577"/>
-          <ac:spMkLst>
-            <pc:docMk/>
-            <pc:sldMk cId="3270141686" sldId="264"/>
-            <ac:spMk id="4" creationId="{64152080-622F-442E-A102-869E6FFC654E}"/>
-          </ac:spMkLst>
-        </pc:spChg>
-      </pc:sldChg>
-      <pc:sldChg chg="ord">
-        <pc:chgData name="Andrew Stone (Nokia)" userId="5e693d72-0831-418e-b3bc-937f682be9d6" providerId="ADAL" clId="{23AA7552-9185-5EEB-9431-C2796A246E54}" dt="2026-06-29T19:00:37.526" v="4396" actId="20578"/>
-        <pc:sldMkLst>
-          <pc:docMk/>
-          <pc:sldMk cId="972341115" sldId="266"/>
-        </pc:sldMkLst>
-      </pc:sldChg>
       <pc:sldChg chg="modSp add mod">
-        <pc:chgData name="Andrew Stone (Nokia)" userId="5e693d72-0831-418e-b3bc-937f682be9d6" providerId="ADAL" clId="{23AA7552-9185-5EEB-9431-C2796A246E54}" dt="2026-06-29T19:19:05.971" v="5787" actId="20577"/>
+        <pc:chgData name="Andrew Stone (Nokia)" userId="5e693d72-0831-418e-b3bc-937f682be9d6" providerId="ADAL" clId="{23AA7552-9185-5EEB-9431-C2796A246E54}" dt="2026-07-20T15:53:45.437" v="6251" actId="20577"/>
         <pc:sldMkLst>
           <pc:docMk/>
           <pc:sldMk cId="1852420669" sldId="267"/>
         </pc:sldMkLst>
         <pc:spChg chg="mod">
-          <ac:chgData name="Andrew Stone (Nokia)" userId="5e693d72-0831-418e-b3bc-937f682be9d6" providerId="ADAL" clId="{23AA7552-9185-5EEB-9431-C2796A246E54}" dt="2026-06-29T19:19:05.971" v="5787" actId="20577"/>
+          <ac:chgData name="Andrew Stone (Nokia)" userId="5e693d72-0831-418e-b3bc-937f682be9d6" providerId="ADAL" clId="{23AA7552-9185-5EEB-9431-C2796A246E54}" dt="2026-07-20T15:53:45.437" v="6251" actId="20577"/>
           <ac:spMkLst>
             <pc:docMk/>
             <pc:sldMk cId="1852420669" sldId="267"/>
@@ -860,48 +191,36 @@
           </ac:spMkLst>
         </pc:spChg>
       </pc:sldChg>
-      <pc:sldChg chg="del">
-        <pc:chgData name="Andrew Stone (Nokia)" userId="5e693d72-0831-418e-b3bc-937f682be9d6" providerId="ADAL" clId="{23AA7552-9185-5EEB-9431-C2796A246E54}" dt="2026-06-29T18:15:44.506" v="3890" actId="2696"/>
-        <pc:sldMkLst>
-          <pc:docMk/>
-          <pc:sldMk cId="4231867602" sldId="267"/>
-        </pc:sldMkLst>
-      </pc:sldChg>
       <pc:sldChg chg="modSp add mod ord">
-        <pc:chgData name="Andrew Stone (Nokia)" userId="5e693d72-0831-418e-b3bc-937f682be9d6" providerId="ADAL" clId="{23AA7552-9185-5EEB-9431-C2796A246E54}" dt="2026-06-29T19:03:00.486" v="4649" actId="20578"/>
+        <pc:chgData name="Andrew Stone (Nokia)" userId="5e693d72-0831-418e-b3bc-937f682be9d6" providerId="ADAL" clId="{23AA7552-9185-5EEB-9431-C2796A246E54}" dt="2026-08-07T15:16:54.635" v="6261" actId="1076"/>
         <pc:sldMkLst>
           <pc:docMk/>
           <pc:sldMk cId="2672411743" sldId="268"/>
         </pc:sldMkLst>
         <pc:spChg chg="mod">
-          <ac:chgData name="Andrew Stone (Nokia)" userId="5e693d72-0831-418e-b3bc-937f682be9d6" providerId="ADAL" clId="{23AA7552-9185-5EEB-9431-C2796A246E54}" dt="2026-06-29T19:02:58.502" v="4648" actId="20577"/>
+          <ac:chgData name="Andrew Stone (Nokia)" userId="5e693d72-0831-418e-b3bc-937f682be9d6" providerId="ADAL" clId="{23AA7552-9185-5EEB-9431-C2796A246E54}" dt="2026-08-07T15:11:10.553" v="6256" actId="1076"/>
           <ac:spMkLst>
             <pc:docMk/>
             <pc:sldMk cId="2672411743" sldId="268"/>
-            <ac:spMk id="2" creationId="{0E491A17-1BFA-004D-4DEC-C9B653FF18C7}"/>
+            <ac:spMk id="13" creationId="{9B15AB06-C007-F00D-E637-B970050FBAB9}"/>
           </ac:spMkLst>
         </pc:spChg>
-      </pc:sldChg>
-      <pc:sldChg chg="del">
-        <pc:chgData name="Andrew Stone (Nokia)" userId="5e693d72-0831-418e-b3bc-937f682be9d6" providerId="ADAL" clId="{23AA7552-9185-5EEB-9431-C2796A246E54}" dt="2026-06-29T18:15:43.699" v="3889" actId="2696"/>
-        <pc:sldMkLst>
-          <pc:docMk/>
-          <pc:sldMk cId="3946934659" sldId="268"/>
-        </pc:sldMkLst>
-      </pc:sldChg>
-      <pc:sldChg chg="del">
-        <pc:chgData name="Andrew Stone (Nokia)" userId="5e693d72-0831-418e-b3bc-937f682be9d6" providerId="ADAL" clId="{23AA7552-9185-5EEB-9431-C2796A246E54}" dt="2026-06-29T18:15:45.084" v="3891" actId="2696"/>
-        <pc:sldMkLst>
-          <pc:docMk/>
-          <pc:sldMk cId="445312685" sldId="269"/>
-        </pc:sldMkLst>
-      </pc:sldChg>
-      <pc:sldChg chg="del">
-        <pc:chgData name="Andrew Stone (Nokia)" userId="5e693d72-0831-418e-b3bc-937f682be9d6" providerId="ADAL" clId="{23AA7552-9185-5EEB-9431-C2796A246E54}" dt="2026-06-29T18:15:45.681" v="3892" actId="2696"/>
-        <pc:sldMkLst>
-          <pc:docMk/>
-          <pc:sldMk cId="1549223711" sldId="270"/>
-        </pc:sldMkLst>
+        <pc:spChg chg="mod">
+          <ac:chgData name="Andrew Stone (Nokia)" userId="5e693d72-0831-418e-b3bc-937f682be9d6" providerId="ADAL" clId="{23AA7552-9185-5EEB-9431-C2796A246E54}" dt="2026-08-07T15:11:10.913" v="6257" actId="1076"/>
+          <ac:spMkLst>
+            <pc:docMk/>
+            <pc:sldMk cId="2672411743" sldId="268"/>
+            <ac:spMk id="15" creationId="{4EAD9673-8B9C-9FEF-63B2-FE582E2A3BE4}"/>
+          </ac:spMkLst>
+        </pc:spChg>
+        <pc:spChg chg="mod">
+          <ac:chgData name="Andrew Stone (Nokia)" userId="5e693d72-0831-418e-b3bc-937f682be9d6" providerId="ADAL" clId="{23AA7552-9185-5EEB-9431-C2796A246E54}" dt="2026-08-07T15:16:54.635" v="6261" actId="1076"/>
+          <ac:spMkLst>
+            <pc:docMk/>
+            <pc:sldMk cId="2672411743" sldId="268"/>
+            <ac:spMk id="48" creationId="{2CC5A0CC-C918-43DD-63EC-42134D54159D}"/>
+          </ac:spMkLst>
+        </pc:spChg>
       </pc:sldChg>
     </pc:docChg>
   </pc:docChgLst>
@@ -990,7 +309,7 @@
           <a:p>
             <a:fld id="{01BC8E05-7B12-154C-9D4F-5CA98AA7EAAB}" type="datetimeFigureOut">
               <a:rPr lang="en-US" smtClean="0"/>
-              <a:t>6/29/26</a:t>
+              <a:t>8/7/26</a:t>
             </a:fld>
             <a:endParaRPr lang="en-US"/>
           </a:p>
@@ -1728,7 +1047,7 @@
           <a:p>
             <a:fld id="{330D5A65-6FA8-2140-AEF8-F0043B51BEFD}" type="datetime1">
               <a:rPr lang="en-CA" smtClean="0"/>
-              <a:t>2026-06-29</a:t>
+              <a:t>2026-08-07</a:t>
             </a:fld>
             <a:endParaRPr lang="en-US"/>
           </a:p>
@@ -1926,7 +1245,7 @@
           <a:p>
             <a:fld id="{3B833B90-B2CE-6541-9742-F010A895A027}" type="datetime1">
               <a:rPr lang="en-CA" smtClean="0"/>
-              <a:t>2026-06-29</a:t>
+              <a:t>2026-08-07</a:t>
             </a:fld>
             <a:endParaRPr lang="en-US"/>
           </a:p>
@@ -2134,7 +1453,7 @@
           <a:p>
             <a:fld id="{6D6A6ACA-1BFE-0647-8620-6A886CD4068C}" type="datetime1">
               <a:rPr lang="en-CA" smtClean="0"/>
-              <a:t>2026-06-29</a:t>
+              <a:t>2026-08-07</a:t>
             </a:fld>
             <a:endParaRPr lang="en-US"/>
           </a:p>
@@ -2332,7 +1651,7 @@
           <a:p>
             <a:fld id="{F131CC93-3697-8D48-BDEA-1F3CF20B5B07}" type="datetime1">
               <a:rPr lang="en-CA" smtClean="0"/>
-              <a:t>2026-06-29</a:t>
+              <a:t>2026-08-07</a:t>
             </a:fld>
             <a:endParaRPr lang="en-US"/>
           </a:p>
@@ -2607,7 +1926,7 @@
           <a:p>
             <a:fld id="{7E36481F-C136-B24D-8E8D-D1CBB612ECD8}" type="datetime1">
               <a:rPr lang="en-CA" smtClean="0"/>
-              <a:t>2026-06-29</a:t>
+              <a:t>2026-08-07</a:t>
             </a:fld>
             <a:endParaRPr lang="en-US"/>
           </a:p>
@@ -2872,7 +2191,7 @@
           <a:p>
             <a:fld id="{D7A8B5B4-6696-7A44-8ECB-1083A2530666}" type="datetime1">
               <a:rPr lang="en-CA" smtClean="0"/>
-              <a:t>2026-06-29</a:t>
+              <a:t>2026-08-07</a:t>
             </a:fld>
             <a:endParaRPr lang="en-US"/>
           </a:p>
@@ -3284,7 +2603,7 @@
           <a:p>
             <a:fld id="{47E111EA-2F92-3D49-B8CB-A14BCA938DC6}" type="datetime1">
               <a:rPr lang="en-CA" smtClean="0"/>
-              <a:t>2026-06-29</a:t>
+              <a:t>2026-08-07</a:t>
             </a:fld>
             <a:endParaRPr lang="en-US"/>
           </a:p>
@@ -3425,7 +2744,7 @@
           <a:p>
             <a:fld id="{BD4A797F-E294-6843-86CC-BDEB2749A06A}" type="datetime1">
               <a:rPr lang="en-CA" smtClean="0"/>
-              <a:t>2026-06-29</a:t>
+              <a:t>2026-08-07</a:t>
             </a:fld>
             <a:endParaRPr lang="en-US"/>
           </a:p>
@@ -3538,7 +2857,7 @@
           <a:p>
             <a:fld id="{AC4E3E37-777F-7543-9A81-4F3F097C7C9F}" type="datetime1">
               <a:rPr lang="en-CA" smtClean="0"/>
-              <a:t>2026-06-29</a:t>
+              <a:t>2026-08-07</a:t>
             </a:fld>
             <a:endParaRPr lang="en-US"/>
           </a:p>
@@ -3849,7 +3168,7 @@
           <a:p>
             <a:fld id="{03F4A878-4A25-C947-8C5F-29BC9B45B0F9}" type="datetime1">
               <a:rPr lang="en-CA" smtClean="0"/>
-              <a:t>2026-06-29</a:t>
+              <a:t>2026-08-07</a:t>
             </a:fld>
             <a:endParaRPr lang="en-US"/>
           </a:p>
@@ -4137,7 +3456,7 @@
           <a:p>
             <a:fld id="{9719E3C6-34F9-0A4B-8F37-22002078A4D7}" type="datetime1">
               <a:rPr lang="en-CA" smtClean="0"/>
-              <a:t>2026-06-29</a:t>
+              <a:t>2026-08-07</a:t>
             </a:fld>
             <a:endParaRPr lang="en-US"/>
           </a:p>
@@ -4378,7 +3697,7 @@
           <a:p>
             <a:fld id="{B5FC1E69-0748-E242-8799-5CC00B345A76}" type="datetime1">
               <a:rPr lang="en-CA" smtClean="0"/>
-              <a:t>2026-06-29</a:t>
+              <a:t>2026-08-07</a:t>
             </a:fld>
             <a:endParaRPr lang="en-US"/>
           </a:p>
@@ -4863,7 +4182,7 @@
         </p:spPr>
         <p:txBody>
           <a:bodyPr>
-            <a:normAutofit/>
+            <a:normAutofit fontScale="77500" lnSpcReduction="20000"/>
           </a:bodyPr>
           <a:lstStyle/>
           <a:p>
@@ -4890,7 +4209,12 @@
               <a:rPr lang="en-US" dirty="0"/>
               <a:t>IETF 126 – Vienna</a:t>
             </a:r>
-            <a:endParaRPr lang="en-US" b="1" u="sng" dirty="0"/>
+          </a:p>
+          <a:p>
+            <a:r>
+              <a:rPr lang="en-US" dirty="0"/>
+              <a:t>SPRING WG Session</a:t>
+            </a:r>
           </a:p>
         </p:txBody>
       </p:sp>
@@ -5106,7 +4430,7 @@
             </a:r>
             <a:r>
               <a:rPr lang="en-US" sz="1200" i="1" dirty="0" err="1"/>
-              <a:t>vbeeram@juniper.net</a:t>
+              <a:t>vishnupavan.ietf@gmail.com</a:t>
             </a:r>
             <a:r>
               <a:rPr lang="en-US" sz="1200" i="1" dirty="0"/>
@@ -5147,6 +4471,48 @@
             <a:r>
               <a:rPr lang="en-US" sz="1200" i="1" dirty="0" err="1"/>
               <a:t>peng.shaofu@zte.com.cn</a:t>
+            </a:r>
+            <a:r>
+              <a:rPr lang="en-US" sz="1200" i="1" dirty="0"/>
+              <a:t>)</a:t>
+            </a:r>
+          </a:p>
+          <a:p>
+            <a:r>
+              <a:rPr lang="en-US" sz="1200" i="1" dirty="0"/>
+              <a:t>Zafar Ali – (</a:t>
+            </a:r>
+            <a:r>
+              <a:rPr lang="en-US" sz="1200" i="1" dirty="0" err="1"/>
+              <a:t>zali.cisco.com</a:t>
+            </a:r>
+            <a:r>
+              <a:rPr lang="en-US" sz="1200" i="1" dirty="0"/>
+              <a:t>)</a:t>
+            </a:r>
+          </a:p>
+          <a:p>
+            <a:r>
+              <a:rPr lang="en-US" sz="1200" i="1" dirty="0"/>
+              <a:t>Siva Sivabalan – (</a:t>
+            </a:r>
+            <a:r>
+              <a:rPr lang="en-US" sz="1200" i="1" dirty="0" err="1"/>
+              <a:t>ssivabal@ciena.com</a:t>
+            </a:r>
+            <a:r>
+              <a:rPr lang="en-US" sz="1200" i="1" dirty="0"/>
+              <a:t>)</a:t>
+            </a:r>
+          </a:p>
+          <a:p>
+            <a:r>
+              <a:rPr lang="en-US" sz="1200" i="1" dirty="0"/>
+              <a:t>Jie Dong – (</a:t>
+            </a:r>
+            <a:r>
+              <a:rPr lang="en-US" sz="1200" i="1" dirty="0" err="1"/>
+              <a:t>jie.dong@huawei.com</a:t>
             </a:r>
             <a:r>
               <a:rPr lang="en-US" sz="1200" i="1" dirty="0"/>
@@ -8080,7 +7446,7 @@
         <p:spPr>
           <a:xfrm>
             <a:off x="433785" y="1333064"/>
-            <a:ext cx="7965994" cy="2542363"/>
+            <a:ext cx="7965994" cy="2957861"/>
           </a:xfrm>
           <a:prstGeom prst="rect">
             <a:avLst/>
@@ -8115,7 +7481,20 @@
             </a:pPr>
             <a:r>
               <a:rPr lang="en-US" dirty="0"/>
-              <a:t>Various text simplification</a:t>
+              <a:t>New co-authors</a:t>
+            </a:r>
+          </a:p>
+          <a:p>
+            <a:pPr marL="342900" indent="-342900">
+              <a:lnSpc>
+                <a:spcPct val="150000"/>
+              </a:lnSpc>
+              <a:buFont typeface="Arial" panose="020B0604020202020204" pitchFamily="34" charset="0"/>
+              <a:buChar char="•"/>
+            </a:pPr>
+            <a:r>
+              <a:rPr lang="en-US" dirty="0"/>
+              <a:t>Various text simplification, dropped some unnecessary content</a:t>
             </a:r>
           </a:p>
           <a:p>
@@ -12491,8 +11870,13 @@
             </a:pPr>
             <a:r>
               <a:rPr lang="en-US" dirty="0"/>
-              <a:t>Seeking WG adoption</a:t>
-            </a:r>
+              <a:t>Seeking </a:t>
+            </a:r>
+            <a:r>
+              <a:rPr lang="en-US"/>
+              <a:t>WG adoption</a:t>
+            </a:r>
+            <a:endParaRPr lang="en-US" dirty="0"/>
           </a:p>
         </p:txBody>
       </p:sp>
